--- a/06-final-report/figures/fig-4-module-structure.pptx
+++ b/06-final-report/figures/fig-4-module-structure.pptx
@@ -915,8 +915,8 @@
         </p:nvSpPr>
         <p:spPr>
           <a:xfrm>
-            <a:off x="3474720" y="594360"/>
-            <a:ext cx="2194560" cy="457200"/>
+            <a:off x="1783080" y="594360"/>
+            <a:ext cx="1965960" cy="457200"/>
           </a:xfrm>
           <a:prstGeom prst="rect">
             <a:avLst/>
@@ -940,8 +940,8 @@
         </p:nvSpPr>
         <p:spPr>
           <a:xfrm>
-            <a:off x="3474720" y="594360"/>
-            <a:ext cx="2194560" cy="457200"/>
+            <a:off x="1783080" y="594360"/>
+            <a:ext cx="1965960" cy="457200"/>
           </a:xfrm>
           <a:prstGeom prst="rect">
             <a:avLst/>
@@ -965,7 +965,7 @@
                 <a:ea typeface="맑은 고딕" pitchFamily="34" charset="-122"/>
                 <a:cs typeface="맑은 고딕" pitchFamily="34" charset="-120"/>
               </a:rPr>
-              <a:t>server.js (진입점)</a:t>
+              <a:t>index.js (진입점)</a:t>
             </a:r>
             <a:endParaRPr lang="en-US" sz="1000" dirty="0"/>
           </a:p>
@@ -979,14 +979,103 @@
         </p:nvSpPr>
         <p:spPr>
           <a:xfrm>
-            <a:off x="228600" y="1691640"/>
-            <a:ext cx="1554480" cy="777240"/>
-          </a:xfrm>
-          <a:prstGeom prst="rect">
-            <a:avLst/>
-          </a:prstGeom>
-          <a:solidFill>
-            <a:srgbClr val="F5F5F5"/>
+            <a:off x="3794760" y="809244"/>
+            <a:ext cx="548640" cy="27432"/>
+          </a:xfrm>
+          <a:prstGeom prst="rect">
+            <a:avLst/>
+          </a:prstGeom>
+          <a:solidFill>
+            <a:srgbClr val="333333"/>
+          </a:solidFill>
+          <a:ln w="12700">
+            <a:solidFill>
+              <a:srgbClr val="333333"/>
+            </a:solidFill>
+            <a:prstDash val="solid"/>
+          </a:ln>
+        </p:spPr>
+      </p:sp>
+      <p:sp>
+        <p:nvSpPr>
+          <p:cNvPr id="6" name="Shape 4"/>
+          <p:cNvSpPr/>
+          <p:nvPr/>
+        </p:nvSpPr>
+        <p:spPr>
+          <a:xfrm rot="5400000">
+            <a:off x="4315968" y="749808"/>
+            <a:ext cx="118872" cy="146304"/>
+          </a:xfrm>
+          <a:prstGeom prst="triangle">
+            <a:avLst/>
+          </a:prstGeom>
+          <a:solidFill>
+            <a:srgbClr val="333333"/>
+          </a:solidFill>
+          <a:ln w="12700">
+            <a:solidFill>
+              <a:srgbClr val="333333"/>
+            </a:solidFill>
+            <a:prstDash val="solid"/>
+          </a:ln>
+        </p:spPr>
+      </p:sp>
+      <p:sp>
+        <p:nvSpPr>
+          <p:cNvPr id="7" name="Text 5"/>
+          <p:cNvSpPr/>
+          <p:nvPr/>
+        </p:nvSpPr>
+        <p:spPr>
+          <a:xfrm>
+            <a:off x="3794760" y="1069848"/>
+            <a:ext cx="640080" cy="146304"/>
+          </a:xfrm>
+          <a:prstGeom prst="rect">
+            <a:avLst/>
+          </a:prstGeom>
+          <a:noFill/>
+          <a:ln/>
+        </p:spPr>
+        <p:txBody>
+          <a:bodyPr wrap="square" rtlCol="0" anchor="ctr"/>
+          <a:lstStyle/>
+          <a:p>
+            <a:pPr algn="ctr" indent="0" marL="0">
+              <a:buNone/>
+            </a:pPr>
+            <a:r>
+              <a:rPr lang="en-US" sz="800" dirty="0">
+                <a:solidFill>
+                  <a:srgbClr val="333333"/>
+                </a:solidFill>
+                <a:latin typeface="맑은 고딕" pitchFamily="34" charset="0"/>
+                <a:ea typeface="맑은 고딕" pitchFamily="34" charset="-122"/>
+                <a:cs typeface="맑은 고딕" pitchFamily="34" charset="-120"/>
+              </a:rPr>
+              <a:t>호출</a:t>
+            </a:r>
+            <a:endParaRPr lang="en-US" sz="800" dirty="0"/>
+          </a:p>
+        </p:txBody>
+      </p:sp>
+      <p:sp>
+        <p:nvSpPr>
+          <p:cNvPr id="8" name="Shape 6"/>
+          <p:cNvSpPr/>
+          <p:nvPr/>
+        </p:nvSpPr>
+        <p:spPr>
+          <a:xfrm>
+            <a:off x="4434840" y="594360"/>
+            <a:ext cx="2377440" cy="457200"/>
+          </a:xfrm>
+          <a:prstGeom prst="rect">
+            <a:avLst/>
+          </a:prstGeom>
+          <a:solidFill>
+            <a:srgbClr val="333333"/>
           </a:solidFill>
           <a:ln w="9525">
             <a:solidFill>
@@ -998,7 +1087,71 @@
       </p:sp>
       <p:sp>
         <p:nvSpPr>
-          <p:cNvPr id="6" name="Text 4"/>
+          <p:cNvPr id="9" name="Text 7"/>
+          <p:cNvSpPr/>
+          <p:nvPr/>
+        </p:nvSpPr>
+        <p:spPr>
+          <a:xfrm>
+            <a:off x="4434840" y="594360"/>
+            <a:ext cx="2377440" cy="457200"/>
+          </a:xfrm>
+          <a:prstGeom prst="rect">
+            <a:avLst/>
+          </a:prstGeom>
+          <a:noFill/>
+          <a:ln/>
+        </p:spPr>
+        <p:txBody>
+          <a:bodyPr wrap="square" rtlCol="0" anchor="ctr"/>
+          <a:lstStyle/>
+          <a:p>
+            <a:pPr algn="ctr" indent="0" marL="0">
+              <a:buNone/>
+            </a:pPr>
+            <a:r>
+              <a:rPr lang="en-US" sz="1000" b="1" dirty="0">
+                <a:solidFill>
+                  <a:srgbClr val="FFFFFF"/>
+                </a:solidFill>
+                <a:latin typeface="맑은 고딕" pitchFamily="34" charset="0"/>
+                <a:ea typeface="맑은 고딕" pitchFamily="34" charset="-122"/>
+                <a:cs typeface="맑은 고딕" pitchFamily="34" charset="-120"/>
+              </a:rPr>
+              <a:t>server.js (서버 구성)</a:t>
+            </a:r>
+            <a:endParaRPr lang="en-US" sz="1000" dirty="0"/>
+          </a:p>
+        </p:txBody>
+      </p:sp>
+      <p:sp>
+        <p:nvSpPr>
+          <p:cNvPr id="10" name="Shape 8"/>
+          <p:cNvSpPr/>
+          <p:nvPr/>
+        </p:nvSpPr>
+        <p:spPr>
+          <a:xfrm>
+            <a:off x="228600" y="1691640"/>
+            <a:ext cx="1554480" cy="777240"/>
+          </a:xfrm>
+          <a:prstGeom prst="rect">
+            <a:avLst/>
+          </a:prstGeom>
+          <a:solidFill>
+            <a:srgbClr val="F5F5F5"/>
+          </a:solidFill>
+          <a:ln w="9525">
+            <a:solidFill>
+              <a:srgbClr val="000000"/>
+            </a:solidFill>
+            <a:prstDash val="solid"/>
+          </a:ln>
+        </p:spPr>
+      </p:sp>
+      <p:sp>
+        <p:nvSpPr>
+          <p:cNvPr id="11" name="Text 9"/>
           <p:cNvSpPr/>
           <p:nvPr/>
         </p:nvSpPr>
@@ -1054,7 +1207,7 @@
       </p:sp>
       <p:sp>
         <p:nvSpPr>
-          <p:cNvPr id="7" name="Shape 5"/>
+          <p:cNvPr id="12" name="Shape 10"/>
           <p:cNvSpPr/>
           <p:nvPr/>
         </p:nvSpPr>
@@ -1079,7 +1232,7 @@
       </p:sp>
       <p:sp>
         <p:nvSpPr>
-          <p:cNvPr id="8" name="Text 6"/>
+          <p:cNvPr id="13" name="Text 11"/>
           <p:cNvSpPr/>
           <p:nvPr/>
         </p:nvSpPr>
@@ -1135,7 +1288,7 @@
       </p:sp>
       <p:sp>
         <p:nvSpPr>
-          <p:cNvPr id="9" name="Shape 7"/>
+          <p:cNvPr id="14" name="Shape 12"/>
           <p:cNvSpPr/>
           <p:nvPr/>
         </p:nvSpPr>
@@ -1160,7 +1313,7 @@
       </p:sp>
       <p:sp>
         <p:nvSpPr>
-          <p:cNvPr id="10" name="Text 8"/>
+          <p:cNvPr id="15" name="Text 13"/>
           <p:cNvSpPr/>
           <p:nvPr/>
         </p:nvSpPr>
@@ -1216,7 +1369,7 @@
       </p:sp>
       <p:sp>
         <p:nvSpPr>
-          <p:cNvPr id="11" name="Shape 9"/>
+          <p:cNvPr id="16" name="Shape 14"/>
           <p:cNvSpPr/>
           <p:nvPr/>
         </p:nvSpPr>
@@ -1241,7 +1394,7 @@
       </p:sp>
       <p:sp>
         <p:nvSpPr>
-          <p:cNvPr id="12" name="Text 10"/>
+          <p:cNvPr id="17" name="Text 15"/>
           <p:cNvSpPr/>
           <p:nvPr/>
         </p:nvSpPr>
@@ -1297,7 +1450,7 @@
       </p:sp>
       <p:sp>
         <p:nvSpPr>
-          <p:cNvPr id="13" name="Shape 11"/>
+          <p:cNvPr id="18" name="Shape 16"/>
           <p:cNvSpPr/>
           <p:nvPr/>
         </p:nvSpPr>
@@ -1322,7 +1475,7 @@
       </p:sp>
       <p:sp>
         <p:nvSpPr>
-          <p:cNvPr id="14" name="Text 12"/>
+          <p:cNvPr id="19" name="Text 17"/>
           <p:cNvSpPr/>
           <p:nvPr/>
         </p:nvSpPr>
@@ -1378,13 +1531,13 @@
       </p:sp>
       <p:sp>
         <p:nvSpPr>
-          <p:cNvPr id="15" name="Shape 13"/>
-          <p:cNvSpPr/>
-          <p:nvPr/>
-        </p:nvSpPr>
-        <p:spPr>
-          <a:xfrm>
-            <a:off x="4567428" y="1051560"/>
+          <p:cNvPr id="20" name="Shape 18"/>
+          <p:cNvSpPr/>
+          <p:nvPr/>
+        </p:nvSpPr>
+        <p:spPr>
+          <a:xfrm>
+            <a:off x="5618988" y="1051560"/>
             <a:ext cx="9144" cy="320040"/>
           </a:xfrm>
           <a:prstGeom prst="rect">
@@ -1403,7 +1556,7 @@
       </p:sp>
       <p:sp>
         <p:nvSpPr>
-          <p:cNvPr id="16" name="Shape 14"/>
+          <p:cNvPr id="21" name="Shape 19"/>
           <p:cNvSpPr/>
           <p:nvPr/>
         </p:nvSpPr>
@@ -1428,7 +1581,7 @@
       </p:sp>
       <p:sp>
         <p:nvSpPr>
-          <p:cNvPr id="17" name="Shape 15"/>
+          <p:cNvPr id="22" name="Shape 20"/>
           <p:cNvSpPr/>
           <p:nvPr/>
         </p:nvSpPr>
@@ -1453,7 +1606,7 @@
       </p:sp>
       <p:sp>
         <p:nvSpPr>
-          <p:cNvPr id="18" name="Shape 16"/>
+          <p:cNvPr id="23" name="Shape 21"/>
           <p:cNvSpPr/>
           <p:nvPr/>
         </p:nvSpPr>
@@ -1478,7 +1631,7 @@
       </p:sp>
       <p:sp>
         <p:nvSpPr>
-          <p:cNvPr id="19" name="Shape 17"/>
+          <p:cNvPr id="24" name="Shape 22"/>
           <p:cNvSpPr/>
           <p:nvPr/>
         </p:nvSpPr>
@@ -1503,7 +1656,7 @@
       </p:sp>
       <p:sp>
         <p:nvSpPr>
-          <p:cNvPr id="20" name="Shape 18"/>
+          <p:cNvPr id="25" name="Shape 23"/>
           <p:cNvSpPr/>
           <p:nvPr/>
         </p:nvSpPr>
@@ -1528,7 +1681,7 @@
       </p:sp>
       <p:sp>
         <p:nvSpPr>
-          <p:cNvPr id="21" name="Shape 19"/>
+          <p:cNvPr id="26" name="Shape 24"/>
           <p:cNvSpPr/>
           <p:nvPr/>
         </p:nvSpPr>
@@ -1553,7 +1706,7 @@
       </p:sp>
       <p:sp>
         <p:nvSpPr>
-          <p:cNvPr id="22" name="Shape 20"/>
+          <p:cNvPr id="27" name="Shape 25"/>
           <p:cNvSpPr/>
           <p:nvPr/>
         </p:nvSpPr>
@@ -1578,7 +1731,7 @@
       </p:sp>
       <p:sp>
         <p:nvSpPr>
-          <p:cNvPr id="23" name="Shape 21"/>
+          <p:cNvPr id="28" name="Shape 26"/>
           <p:cNvSpPr/>
           <p:nvPr/>
         </p:nvSpPr>
@@ -1603,7 +1756,7 @@
       </p:sp>
       <p:sp>
         <p:nvSpPr>
-          <p:cNvPr id="24" name="Shape 22"/>
+          <p:cNvPr id="29" name="Shape 27"/>
           <p:cNvSpPr/>
           <p:nvPr/>
         </p:nvSpPr>
@@ -1628,7 +1781,7 @@
       </p:sp>
       <p:sp>
         <p:nvSpPr>
-          <p:cNvPr id="25" name="Shape 23"/>
+          <p:cNvPr id="30" name="Shape 28"/>
           <p:cNvSpPr/>
           <p:nvPr/>
         </p:nvSpPr>
@@ -1653,7 +1806,7 @@
       </p:sp>
       <p:sp>
         <p:nvSpPr>
-          <p:cNvPr id="26" name="Shape 24"/>
+          <p:cNvPr id="31" name="Shape 29"/>
           <p:cNvSpPr/>
           <p:nvPr/>
         </p:nvSpPr>
@@ -1678,7 +1831,7 @@
       </p:sp>
       <p:sp>
         <p:nvSpPr>
-          <p:cNvPr id="27" name="Text 25"/>
+          <p:cNvPr id="32" name="Text 30"/>
           <p:cNvSpPr/>
           <p:nvPr/>
         </p:nvSpPr>
@@ -1717,7 +1870,7 @@
       </p:sp>
       <p:sp>
         <p:nvSpPr>
-          <p:cNvPr id="28" name="Text 26"/>
+          <p:cNvPr id="33" name="Text 31"/>
           <p:cNvSpPr/>
           <p:nvPr/>
         </p:nvSpPr>
@@ -1756,7 +1909,7 @@
       </p:sp>
       <p:sp>
         <p:nvSpPr>
-          <p:cNvPr id="29" name="Shape 27"/>
+          <p:cNvPr id="34" name="Shape 32"/>
           <p:cNvSpPr/>
           <p:nvPr/>
         </p:nvSpPr>
@@ -1781,7 +1934,7 @@
       </p:sp>
       <p:sp>
         <p:nvSpPr>
-          <p:cNvPr id="30" name="Text 28"/>
+          <p:cNvPr id="35" name="Text 33"/>
           <p:cNvSpPr/>
           <p:nvPr/>
         </p:nvSpPr>
@@ -1837,7 +1990,7 @@
       </p:sp>
       <p:sp>
         <p:nvSpPr>
-          <p:cNvPr id="31" name="Shape 29"/>
+          <p:cNvPr id="36" name="Shape 34"/>
           <p:cNvSpPr/>
           <p:nvPr/>
         </p:nvSpPr>
@@ -1862,7 +2015,7 @@
       </p:sp>
       <p:sp>
         <p:nvSpPr>
-          <p:cNvPr id="32" name="Text 30"/>
+          <p:cNvPr id="37" name="Text 35"/>
           <p:cNvSpPr/>
           <p:nvPr/>
         </p:nvSpPr>
@@ -1901,7 +2054,7 @@
       </p:sp>
       <p:sp>
         <p:nvSpPr>
-          <p:cNvPr id="33" name="Text 31"/>
+          <p:cNvPr id="38" name="Text 36"/>
           <p:cNvSpPr/>
           <p:nvPr/>
         </p:nvSpPr>

--- a/06-final-report/figures/fig-4-module-structure.pptx
+++ b/06-final-report/figures/fig-4-module-structure.pptx
@@ -1965,7 +1965,7 @@
                 <a:ea typeface="맑은 고딕" pitchFamily="34" charset="-122"/>
                 <a:cs typeface="맑은 고딕" pitchFamily="34" charset="-120"/>
               </a:rPr>
-              <a:t>rate-limiter/</a:t>
+              <a:t>utils/</a:t>
             </a:r>
             <a:endParaRPr lang="en-US" sz="900" dirty="0"/>
           </a:p>
@@ -1982,7 +1982,7 @@
                 <a:ea typeface="맑은 고딕" pitchFamily="34" charset="-122"/>
                 <a:cs typeface="맑은 고딕" pitchFamily="34" charset="-120"/>
               </a:rPr>
-              <a:t>(요청 제한)</a:t>
+              <a:t>rateLimiter.js (요청 제한)</a:t>
             </a:r>
             <a:endParaRPr lang="en-US" sz="900" dirty="0"/>
           </a:p>
